--- a/materials/lectures/03-time_complexity-pt_II/slides.pptx
+++ b/materials/lectures/03-time_complexity-pt_II/slides.pptx
@@ -329,7 +329,7 @@
               <a:pPr>
                 <a:defRPr/>
               </a:pPr>
-              <a:t>1/12/2025</a:t>
+              <a:t>1/15/2025</a:t>
             </a:fld>
             <a:endParaRPr lang="en-US"/>
           </a:p>
@@ -1017,7 +1017,7 @@
               <a:pPr>
                 <a:defRPr/>
               </a:pPr>
-              <a:t>1/12/2025</a:t>
+              <a:t>1/15/2025</a:t>
             </a:fld>
             <a:endParaRPr lang="en-US"/>
           </a:p>
@@ -1261,7 +1261,7 @@
           <a:p>
             <a:fld id="{344494C4-6097-4BA9-B81C-8FE8D10E85BA}" type="datetimeFigureOut">
               <a:rPr lang="en-US" smtClean="0"/>
-              <a:t>1/12/2025</a:t>
+              <a:t>1/15/2025</a:t>
             </a:fld>
             <a:endParaRPr lang="en-US"/>
           </a:p>
@@ -1506,7 +1506,7 @@
           <a:p>
             <a:fld id="{344494C4-6097-4BA9-B81C-8FE8D10E85BA}" type="datetimeFigureOut">
               <a:rPr lang="en-US" smtClean="0"/>
-              <a:t>1/12/2025</a:t>
+              <a:t>1/15/2025</a:t>
             </a:fld>
             <a:endParaRPr lang="en-US"/>
           </a:p>
@@ -1886,7 +1886,7 @@
           <a:p>
             <a:fld id="{344494C4-6097-4BA9-B81C-8FE8D10E85BA}" type="datetimeFigureOut">
               <a:rPr lang="en-US" smtClean="0"/>
-              <a:t>1/12/2025</a:t>
+              <a:t>1/15/2025</a:t>
             </a:fld>
             <a:endParaRPr lang="en-US"/>
           </a:p>
@@ -2019,7 +2019,7 @@
           <a:p>
             <a:fld id="{344494C4-6097-4BA9-B81C-8FE8D10E85BA}" type="datetimeFigureOut">
               <a:rPr lang="en-US" smtClean="0"/>
-              <a:t>1/12/2025</a:t>
+              <a:t>1/15/2025</a:t>
             </a:fld>
             <a:endParaRPr lang="en-US"/>
           </a:p>
@@ -2130,7 +2130,7 @@
           <a:p>
             <a:fld id="{344494C4-6097-4BA9-B81C-8FE8D10E85BA}" type="datetimeFigureOut">
               <a:rPr lang="en-US" smtClean="0"/>
-              <a:t>1/12/2025</a:t>
+              <a:t>1/15/2025</a:t>
             </a:fld>
             <a:endParaRPr lang="en-US"/>
           </a:p>
@@ -2421,7 +2421,7 @@
           <a:p>
             <a:fld id="{344494C4-6097-4BA9-B81C-8FE8D10E85BA}" type="datetimeFigureOut">
               <a:rPr lang="en-US" smtClean="0"/>
-              <a:t>1/12/2025</a:t>
+              <a:t>1/15/2025</a:t>
             </a:fld>
             <a:endParaRPr lang="en-US"/>
           </a:p>
@@ -2689,7 +2689,7 @@
           <a:p>
             <a:fld id="{344494C4-6097-4BA9-B81C-8FE8D10E85BA}" type="datetimeFigureOut">
               <a:rPr lang="en-US" smtClean="0"/>
-              <a:t>1/12/2025</a:t>
+              <a:t>1/15/2025</a:t>
             </a:fld>
             <a:endParaRPr lang="en-US"/>
           </a:p>
@@ -2873,7 +2873,7 @@
           <a:p>
             <a:fld id="{344494C4-6097-4BA9-B81C-8FE8D10E85BA}" type="datetimeFigureOut">
               <a:rPr lang="en-US" smtClean="0"/>
-              <a:t>1/12/2025</a:t>
+              <a:t>1/15/2025</a:t>
             </a:fld>
             <a:endParaRPr lang="en-US"/>
           </a:p>
@@ -3067,7 +3067,7 @@
           <a:p>
             <a:fld id="{344494C4-6097-4BA9-B81C-8FE8D10E85BA}" type="datetimeFigureOut">
               <a:rPr lang="en-US" smtClean="0"/>
-              <a:t>1/12/2025</a:t>
+              <a:t>1/15/2025</a:t>
             </a:fld>
             <a:endParaRPr lang="en-US"/>
           </a:p>
@@ -3265,7 +3265,7 @@
           <a:p>
             <a:fld id="{7BF7D500-1223-4445-9EB2-2C72C770F9EB}" type="datetimeFigureOut">
               <a:rPr lang="en-US" smtClean="0"/>
-              <a:t>1/12/2025</a:t>
+              <a:t>1/15/2025</a:t>
             </a:fld>
             <a:endParaRPr lang="en-US"/>
           </a:p>
@@ -3448,7 +3448,7 @@
               <a:pPr>
                 <a:defRPr/>
               </a:pPr>
-              <a:t>1/12/2025</a:t>
+              <a:t>1/15/2025</a:t>
             </a:fld>
             <a:endParaRPr lang="en-US"/>
           </a:p>
@@ -3602,7 +3602,7 @@
           <a:p>
             <a:fld id="{7BF7D500-1223-4445-9EB2-2C72C770F9EB}" type="datetimeFigureOut">
               <a:rPr lang="en-US" smtClean="0"/>
-              <a:t>1/12/2025</a:t>
+              <a:t>1/15/2025</a:t>
             </a:fld>
             <a:endParaRPr lang="en-US"/>
           </a:p>
@@ -3847,7 +3847,7 @@
           <a:p>
             <a:fld id="{7BF7D500-1223-4445-9EB2-2C72C770F9EB}" type="datetimeFigureOut">
               <a:rPr lang="en-US" smtClean="0"/>
-              <a:t>1/12/2025</a:t>
+              <a:t>1/15/2025</a:t>
             </a:fld>
             <a:endParaRPr lang="en-US"/>
           </a:p>
@@ -4076,7 +4076,7 @@
           <a:p>
             <a:fld id="{7BF7D500-1223-4445-9EB2-2C72C770F9EB}" type="datetimeFigureOut">
               <a:rPr lang="en-US" smtClean="0"/>
-              <a:t>1/12/2025</a:t>
+              <a:t>1/15/2025</a:t>
             </a:fld>
             <a:endParaRPr lang="en-US"/>
           </a:p>
@@ -4440,7 +4440,7 @@
           <a:p>
             <a:fld id="{7BF7D500-1223-4445-9EB2-2C72C770F9EB}" type="datetimeFigureOut">
               <a:rPr lang="en-US" smtClean="0"/>
-              <a:t>1/12/2025</a:t>
+              <a:t>1/15/2025</a:t>
             </a:fld>
             <a:endParaRPr lang="en-US"/>
           </a:p>
@@ -4557,7 +4557,7 @@
           <a:p>
             <a:fld id="{7BF7D500-1223-4445-9EB2-2C72C770F9EB}" type="datetimeFigureOut">
               <a:rPr lang="en-US" smtClean="0"/>
-              <a:t>1/12/2025</a:t>
+              <a:t>1/15/2025</a:t>
             </a:fld>
             <a:endParaRPr lang="en-US"/>
           </a:p>
@@ -4652,7 +4652,7 @@
           <a:p>
             <a:fld id="{7BF7D500-1223-4445-9EB2-2C72C770F9EB}" type="datetimeFigureOut">
               <a:rPr lang="en-US" smtClean="0"/>
-              <a:t>1/12/2025</a:t>
+              <a:t>1/15/2025</a:t>
             </a:fld>
             <a:endParaRPr lang="en-US"/>
           </a:p>
@@ -4927,7 +4927,7 @@
           <a:p>
             <a:fld id="{7BF7D500-1223-4445-9EB2-2C72C770F9EB}" type="datetimeFigureOut">
               <a:rPr lang="en-US" smtClean="0"/>
-              <a:t>1/12/2025</a:t>
+              <a:t>1/15/2025</a:t>
             </a:fld>
             <a:endParaRPr lang="en-US"/>
           </a:p>
@@ -5179,7 +5179,7 @@
           <a:p>
             <a:fld id="{7BF7D500-1223-4445-9EB2-2C72C770F9EB}" type="datetimeFigureOut">
               <a:rPr lang="en-US" smtClean="0"/>
-              <a:t>1/12/2025</a:t>
+              <a:t>1/15/2025</a:t>
             </a:fld>
             <a:endParaRPr lang="en-US"/>
           </a:p>
@@ -5347,7 +5347,7 @@
           <a:p>
             <a:fld id="{7BF7D500-1223-4445-9EB2-2C72C770F9EB}" type="datetimeFigureOut">
               <a:rPr lang="en-US" smtClean="0"/>
-              <a:t>1/12/2025</a:t>
+              <a:t>1/15/2025</a:t>
             </a:fld>
             <a:endParaRPr lang="en-US"/>
           </a:p>
@@ -5525,7 +5525,7 @@
           <a:p>
             <a:fld id="{7BF7D500-1223-4445-9EB2-2C72C770F9EB}" type="datetimeFigureOut">
               <a:rPr lang="en-US" smtClean="0"/>
-              <a:t>1/12/2025</a:t>
+              <a:t>1/15/2025</a:t>
             </a:fld>
             <a:endParaRPr lang="en-US"/>
           </a:p>
@@ -5769,7 +5769,7 @@
               <a:pPr>
                 <a:defRPr/>
               </a:pPr>
-              <a:t>1/12/2025</a:t>
+              <a:t>1/15/2025</a:t>
             </a:fld>
             <a:endParaRPr lang="en-US"/>
           </a:p>
@@ -6119,7 +6119,7 @@
               <a:pPr>
                 <a:defRPr/>
               </a:pPr>
-              <a:t>1/12/2025</a:t>
+              <a:t>1/15/2025</a:t>
             </a:fld>
             <a:endParaRPr lang="en-US"/>
           </a:p>
@@ -6283,7 +6283,7 @@
               <a:pPr>
                 <a:defRPr/>
               </a:pPr>
-              <a:t>1/12/2025</a:t>
+              <a:t>1/15/2025</a:t>
             </a:fld>
             <a:endParaRPr lang="en-US"/>
           </a:p>
@@ -6374,7 +6374,7 @@
               <a:pPr>
                 <a:defRPr/>
               </a:pPr>
-              <a:t>1/12/2025</a:t>
+              <a:t>1/15/2025</a:t>
             </a:fld>
             <a:endParaRPr lang="en-US"/>
           </a:p>
@@ -6483,7 +6483,7 @@
               <a:pPr>
                 <a:defRPr/>
               </a:pPr>
-              <a:t>1/12/2025</a:t>
+              <a:t>1/15/2025</a:t>
             </a:fld>
             <a:endParaRPr lang="en-US"/>
           </a:p>
@@ -6668,7 +6668,7 @@
           <a:p>
             <a:fld id="{344494C4-6097-4BA9-B81C-8FE8D10E85BA}" type="datetimeFigureOut">
               <a:rPr lang="en-US" smtClean="0"/>
-              <a:t>1/12/2025</a:t>
+              <a:t>1/15/2025</a:t>
             </a:fld>
             <a:endParaRPr lang="en-US"/>
           </a:p>
@@ -6852,7 +6852,7 @@
           <a:p>
             <a:fld id="{344494C4-6097-4BA9-B81C-8FE8D10E85BA}" type="datetimeFigureOut">
               <a:rPr lang="en-US" smtClean="0"/>
-              <a:t>1/12/2025</a:t>
+              <a:t>1/15/2025</a:t>
             </a:fld>
             <a:endParaRPr lang="en-US"/>
           </a:p>
@@ -7101,7 +7101,7 @@
               <a:pPr>
                 <a:defRPr/>
               </a:pPr>
-              <a:t>1/12/2025</a:t>
+              <a:t>1/15/2025</a:t>
             </a:fld>
             <a:endParaRPr lang="en-US"/>
           </a:p>
@@ -8355,7 +8355,7 @@
           <a:p>
             <a:fld id="{7BF7D500-1223-4445-9EB2-2C72C770F9EB}" type="datetimeFigureOut">
               <a:rPr lang="en-US" smtClean="0"/>
-              <a:t>1/12/2025</a:t>
+              <a:t>1/15/2025</a:t>
             </a:fld>
             <a:endParaRPr lang="en-US"/>
           </a:p>
@@ -18655,8 +18655,8 @@
           </a:p>
         </p:txBody>
       </p:sp>
-      <mc:AlternateContent xmlns:mc="http://schemas.openxmlformats.org/markup-compatibility/2006" xmlns:a14="http://schemas.microsoft.com/office/drawing/2010/main">
-        <mc:Choice Requires="a14">
+      <mc:AlternateContent xmlns:mc="http://schemas.openxmlformats.org/markup-compatibility/2006">
+        <mc:Choice xmlns:a14="http://schemas.microsoft.com/office/drawing/2010/main" Requires="a14">
           <p:sp>
             <p:nvSpPr>
               <p:cNvPr id="4" name="Rectangle 3">
@@ -18997,7 +18997,7 @@
                       <a:rPr lang="en-US" sz="2100" b="0" i="1" smtClean="0">
                         <a:latin typeface="Cambria Math" panose="02040503050406030204" pitchFamily="18" charset="0"/>
                       </a:rPr>
-                      <m:t> \</m:t>
+                      <m:t> </m:t>
                     </m:r>
                     <m:r>
                       <m:rPr>
@@ -19044,7 +19044,7 @@
             </p:txBody>
           </p:sp>
         </mc:Choice>
-        <mc:Fallback xmlns="">
+        <mc:Fallback>
           <p:sp>
             <p:nvSpPr>
               <p:cNvPr id="4" name="Rectangle 3">
